--- a/prrez1.pptx
+++ b/prrez1.pptx
@@ -112,6 +112,11 @@
       </a:defRPr>
     </a:lvl9pPr>
   </p:defaultTextStyle>
+  <p:extLst>
+    <p:ext uri="{EFAFB233-063F-42B5-8137-9DF3F51BA10A}">
+      <p15:sldGuideLst xmlns:p15="http://schemas.microsoft.com/office/powerpoint/2012/main"/>
+    </p:ext>
+  </p:extLst>
 </p:presentation>
 </file>
 
@@ -446,7 +451,7 @@
           <a:p>
             <a:fld id="{08DA69F3-0C43-4907-A62D-709CBB3711BE}" type="datetimeFigureOut">
               <a:rPr lang="ru-RU" smtClean="0"/>
-              <a:t>04.03.2026</a:t>
+              <a:t>24.04.2026</a:t>
             </a:fld>
             <a:endParaRPr lang="ru-RU"/>
           </a:p>
@@ -770,7 +775,7 @@
           <a:p>
             <a:fld id="{08DA69F3-0C43-4907-A62D-709CBB3711BE}" type="datetimeFigureOut">
               <a:rPr lang="ru-RU" smtClean="0"/>
-              <a:t>04.03.2026</a:t>
+              <a:t>24.04.2026</a:t>
             </a:fld>
             <a:endParaRPr lang="ru-RU"/>
           </a:p>
@@ -1018,7 +1023,7 @@
           <a:p>
             <a:fld id="{08DA69F3-0C43-4907-A62D-709CBB3711BE}" type="datetimeFigureOut">
               <a:rPr lang="ru-RU" smtClean="0"/>
-              <a:t>04.03.2026</a:t>
+              <a:t>24.04.2026</a:t>
             </a:fld>
             <a:endParaRPr lang="ru-RU"/>
           </a:p>
@@ -1357,7 +1362,7 @@
           <a:p>
             <a:fld id="{08DA69F3-0C43-4907-A62D-709CBB3711BE}" type="datetimeFigureOut">
               <a:rPr lang="ru-RU" smtClean="0"/>
-              <a:t>04.03.2026</a:t>
+              <a:t>24.04.2026</a:t>
             </a:fld>
             <a:endParaRPr lang="ru-RU"/>
           </a:p>
@@ -1704,7 +1709,7 @@
           <a:p>
             <a:fld id="{08DA69F3-0C43-4907-A62D-709CBB3711BE}" type="datetimeFigureOut">
               <a:rPr lang="ru-RU" smtClean="0"/>
-              <a:t>04.03.2026</a:t>
+              <a:t>24.04.2026</a:t>
             </a:fld>
             <a:endParaRPr lang="ru-RU"/>
           </a:p>
@@ -2078,7 +2083,7 @@
           <a:p>
             <a:fld id="{08DA69F3-0C43-4907-A62D-709CBB3711BE}" type="datetimeFigureOut">
               <a:rPr lang="ru-RU" smtClean="0"/>
-              <a:t>04.03.2026</a:t>
+              <a:t>24.04.2026</a:t>
             </a:fld>
             <a:endParaRPr lang="ru-RU"/>
           </a:p>
@@ -2548,7 +2553,7 @@
           <a:p>
             <a:fld id="{08DA69F3-0C43-4907-A62D-709CBB3711BE}" type="datetimeFigureOut">
               <a:rPr lang="ru-RU" smtClean="0"/>
-              <a:t>04.03.2026</a:t>
+              <a:t>24.04.2026</a:t>
             </a:fld>
             <a:endParaRPr lang="ru-RU"/>
           </a:p>
@@ -2753,7 +2758,7 @@
           <a:p>
             <a:fld id="{08DA69F3-0C43-4907-A62D-709CBB3711BE}" type="datetimeFigureOut">
               <a:rPr lang="ru-RU" smtClean="0"/>
-              <a:t>04.03.2026</a:t>
+              <a:t>24.04.2026</a:t>
             </a:fld>
             <a:endParaRPr lang="ru-RU"/>
           </a:p>
@@ -2964,7 +2969,7 @@
           <a:p>
             <a:fld id="{08DA69F3-0C43-4907-A62D-709CBB3711BE}" type="datetimeFigureOut">
               <a:rPr lang="ru-RU" smtClean="0"/>
-              <a:t>04.03.2026</a:t>
+              <a:t>24.04.2026</a:t>
             </a:fld>
             <a:endParaRPr lang="ru-RU"/>
           </a:p>
@@ -3196,7 +3201,7 @@
           <a:p>
             <a:fld id="{08DA69F3-0C43-4907-A62D-709CBB3711BE}" type="datetimeFigureOut">
               <a:rPr lang="ru-RU" smtClean="0"/>
-              <a:t>04.03.2026</a:t>
+              <a:t>24.04.2026</a:t>
             </a:fld>
             <a:endParaRPr lang="ru-RU"/>
           </a:p>
@@ -3444,7 +3449,7 @@
           <a:p>
             <a:fld id="{08DA69F3-0C43-4907-A62D-709CBB3711BE}" type="datetimeFigureOut">
               <a:rPr lang="ru-RU" smtClean="0"/>
-              <a:t>04.03.2026</a:t>
+              <a:t>24.04.2026</a:t>
             </a:fld>
             <a:endParaRPr lang="ru-RU"/>
           </a:p>
@@ -3742,7 +3747,7 @@
           <a:p>
             <a:fld id="{08DA69F3-0C43-4907-A62D-709CBB3711BE}" type="datetimeFigureOut">
               <a:rPr lang="ru-RU" smtClean="0"/>
-              <a:t>04.03.2026</a:t>
+              <a:t>24.04.2026</a:t>
             </a:fld>
             <a:endParaRPr lang="ru-RU"/>
           </a:p>
@@ -4136,7 +4141,7 @@
           <a:p>
             <a:fld id="{08DA69F3-0C43-4907-A62D-709CBB3711BE}" type="datetimeFigureOut">
               <a:rPr lang="ru-RU" smtClean="0"/>
-              <a:t>04.03.2026</a:t>
+              <a:t>24.04.2026</a:t>
             </a:fld>
             <a:endParaRPr lang="ru-RU"/>
           </a:p>
@@ -4285,7 +4290,7 @@
           <a:p>
             <a:fld id="{08DA69F3-0C43-4907-A62D-709CBB3711BE}" type="datetimeFigureOut">
               <a:rPr lang="ru-RU" smtClean="0"/>
-              <a:t>04.03.2026</a:t>
+              <a:t>24.04.2026</a:t>
             </a:fld>
             <a:endParaRPr lang="ru-RU"/>
           </a:p>
@@ -4411,7 +4416,7 @@
           <a:p>
             <a:fld id="{08DA69F3-0C43-4907-A62D-709CBB3711BE}" type="datetimeFigureOut">
               <a:rPr lang="ru-RU" smtClean="0"/>
-              <a:t>04.03.2026</a:t>
+              <a:t>24.04.2026</a:t>
             </a:fld>
             <a:endParaRPr lang="ru-RU"/>
           </a:p>
@@ -4666,7 +4671,7 @@
           <a:p>
             <a:fld id="{08DA69F3-0C43-4907-A62D-709CBB3711BE}" type="datetimeFigureOut">
               <a:rPr lang="ru-RU" smtClean="0"/>
-              <a:t>04.03.2026</a:t>
+              <a:t>24.04.2026</a:t>
             </a:fld>
             <a:endParaRPr lang="ru-RU"/>
           </a:p>
@@ -4981,7 +4986,7 @@
           <a:p>
             <a:fld id="{08DA69F3-0C43-4907-A62D-709CBB3711BE}" type="datetimeFigureOut">
               <a:rPr lang="ru-RU" smtClean="0"/>
-              <a:t>04.03.2026</a:t>
+              <a:t>24.04.2026</a:t>
             </a:fld>
             <a:endParaRPr lang="ru-RU"/>
           </a:p>
@@ -5332,7 +5337,7 @@
           <a:p>
             <a:fld id="{08DA69F3-0C43-4907-A62D-709CBB3711BE}" type="datetimeFigureOut">
               <a:rPr lang="ru-RU" smtClean="0"/>
-              <a:t>04.03.2026</a:t>
+              <a:t>24.04.2026</a:t>
             </a:fld>
             <a:endParaRPr lang="ru-RU"/>
           </a:p>
@@ -5896,19 +5901,6 @@
           <a:bodyPr/>
           <a:lstStyle/>
           <a:p>
-            <a:r>
-              <a:rPr lang="ru-RU" sz="4000" b="1" dirty="0">
-                <a:latin typeface="Times New Roman" panose="02020603050405020304" pitchFamily="18" charset="0"/>
-                <a:cs typeface="Times New Roman" panose="02020603050405020304" pitchFamily="18" charset="0"/>
-              </a:rPr>
-              <a:t>Поддержка многозадачности</a:t>
-            </a:r>
-            <a:br>
-              <a:rPr lang="ru-RU" sz="4000" b="1" dirty="0">
-                <a:latin typeface="Times New Roman" panose="02020603050405020304" pitchFamily="18" charset="0"/>
-                <a:cs typeface="Times New Roman" panose="02020603050405020304" pitchFamily="18" charset="0"/>
-              </a:rPr>
-            </a:br>
             <a:endParaRPr lang="ru-RU" sz="4000" dirty="0">
               <a:latin typeface="Times New Roman" panose="02020603050405020304" pitchFamily="18" charset="0"/>
               <a:cs typeface="Times New Roman" panose="02020603050405020304" pitchFamily="18" charset="0"/>
